--- a/dist/초3/과학/생물/초3_과학_생물_02_동물의한살이.pptx
+++ b/dist/초3/과학/생물/초3_과학_생물_02_동물의한살이.pptx
@@ -121,13 +121,13 @@
   <p:extLst>
     <p:ext uri="{521415D9-36F7-43E2-AB2F-B90AF26B5E84}">
       <p14:sectionLst xmlns:p14="http://schemas.microsoft.com/office/powerpoint/2010/main">
-        <p14:section name="도입" id="{ef47e712-039a-dde5-f098-58295159b71b}">
+        <p14:section name="도입" id="{e02fea0d-7acc-ea61-a4d7-18e2a4f21637}">
           <p14:sldIdLst>
             <p14:sldId id="256"/>
             <p14:sldId id="257"/>
           </p14:sldIdLst>
         </p14:section>
-        <p14:section name="개념" id="{6d740031-20fe-97d9-6ae0-0a53e145c28a}">
+        <p14:section name="개념" id="{9544ba97-0a06-9c08-ac8e-f342ee5c9951}">
           <p14:sldIdLst>
             <p14:sldId id="258"/>
             <p14:sldId id="259"/>
@@ -138,30 +138,30 @@
             <p14:sldId id="265"/>
           </p14:sldIdLst>
         </p14:section>
-        <p14:section name="연습" id="{0c09af9d-5e54-fff7-0291-f57ac5ab8fe9}">
+        <p14:section name="연습" id="{7e23309c-99c8-8fef-96e3-dd3d43e17849}">
           <p14:sldIdLst>
             <p14:sldId id="263"/>
             <p14:sldId id="266"/>
           </p14:sldIdLst>
         </p14:section>
-        <p14:section name="개념" id="{8509a4ac-7ad8-afab-21d1-65310842913e}">
+        <p14:section name="개념" id="{b72f4b40-0b8b-b75a-f7e4-fb06b6466d24}">
           <p14:sldIdLst/>
         </p14:section>
-        <p14:section name="연습" id="{b25f9432-d672-4c65-c591-9d58aa234b8c}">
+        <p14:section name="연습" id="{97121a53-6407-2ca7-5ca9-88bafc5ba1b7}">
           <p14:sldIdLst/>
         </p14:section>
-        <p14:section name="확인" id="{b8b70f9e-5316-e385-9040-f4fa0b7ad0d0}">
+        <p14:section name="확인" id="{4f6b6508-13a9-2816-cc23-39296a5a598f}">
           <p14:sldIdLst>
             <p14:sldId id="267"/>
             <p14:sldId id="268"/>
           </p14:sldIdLst>
         </p14:section>
-        <p14:section name="정리" id="{375a7d16-caea-5caf-0443-823905f8b538}">
+        <p14:section name="정리" id="{01a1df73-02d4-524f-23f8-ffc36a97c860}">
           <p14:sldIdLst>
             <p14:sldId id="269"/>
           </p14:sldIdLst>
         </p14:section>
-        <p14:section name="보충" id="{aa372d69-d0d5-6078-97ea-cab7f9e113b4}">
+        <p14:section name="보충" id="{58e58c82-cd71-ed32-2f1a-ae82cba20929}">
           <p14:sldIdLst>
             <p14:sldId id="270"/>
           </p14:sldIdLst>
